--- a/Dossier de conception.pptx
+++ b/Dossier de conception.pptx
@@ -212,7 +212,7 @@
           <a:p>
             <a:fld id="{FC6F517D-CE64-462C-AD75-344A9B99B847}" type="datetimeFigureOut">
               <a:rPr lang="fr-CM" smtClean="0"/>
-              <a:t>17/01/2026</a:t>
+              <a:t>23/01/2026</a:t>
             </a:fld>
             <a:endParaRPr lang="fr-CM"/>
           </a:p>
@@ -735,7 +735,7 @@
           <a:p>
             <a:fld id="{9A2ADD78-B297-491E-B195-029A9672D6CB}" type="datetimeFigureOut">
               <a:rPr lang="fr-FR" smtClean="0"/>
-              <a:t>17/01/2026</a:t>
+              <a:t>23/01/2026</a:t>
             </a:fld>
             <a:endParaRPr lang="fr-FR"/>
           </a:p>
@@ -1047,7 +1047,7 @@
           <a:p>
             <a:fld id="{9A2ADD78-B297-491E-B195-029A9672D6CB}" type="datetimeFigureOut">
               <a:rPr lang="fr-FR" smtClean="0"/>
-              <a:t>17/01/2026</a:t>
+              <a:t>23/01/2026</a:t>
             </a:fld>
             <a:endParaRPr lang="fr-FR"/>
           </a:p>
@@ -1269,7 +1269,7 @@
           <a:p>
             <a:fld id="{9A2ADD78-B297-491E-B195-029A9672D6CB}" type="datetimeFigureOut">
               <a:rPr lang="fr-FR" smtClean="0"/>
-              <a:t>17/01/2026</a:t>
+              <a:t>23/01/2026</a:t>
             </a:fld>
             <a:endParaRPr lang="fr-FR"/>
           </a:p>
@@ -1560,7 +1560,7 @@
           <a:p>
             <a:fld id="{9A2ADD78-B297-491E-B195-029A9672D6CB}" type="datetimeFigureOut">
               <a:rPr lang="fr-FR" smtClean="0"/>
-              <a:t>17/01/2026</a:t>
+              <a:t>23/01/2026</a:t>
             </a:fld>
             <a:endParaRPr lang="fr-FR"/>
           </a:p>
@@ -2014,7 +2014,7 @@
           <a:p>
             <a:fld id="{9A2ADD78-B297-491E-B195-029A9672D6CB}" type="datetimeFigureOut">
               <a:rPr lang="fr-FR" smtClean="0"/>
-              <a:t>17/01/2026</a:t>
+              <a:t>23/01/2026</a:t>
             </a:fld>
             <a:endParaRPr lang="fr-FR"/>
           </a:p>
@@ -2590,7 +2590,7 @@
           <a:p>
             <a:fld id="{9A2ADD78-B297-491E-B195-029A9672D6CB}" type="datetimeFigureOut">
               <a:rPr lang="fr-FR" smtClean="0"/>
-              <a:t>17/01/2026</a:t>
+              <a:t>23/01/2026</a:t>
             </a:fld>
             <a:endParaRPr lang="fr-FR"/>
           </a:p>
@@ -3442,7 +3442,7 @@
           <a:p>
             <a:fld id="{9A2ADD78-B297-491E-B195-029A9672D6CB}" type="datetimeFigureOut">
               <a:rPr lang="fr-FR" smtClean="0"/>
-              <a:t>17/01/2026</a:t>
+              <a:t>23/01/2026</a:t>
             </a:fld>
             <a:endParaRPr lang="fr-FR"/>
           </a:p>
@@ -3647,7 +3647,7 @@
           <a:p>
             <a:fld id="{9A2ADD78-B297-491E-B195-029A9672D6CB}" type="datetimeFigureOut">
               <a:rPr lang="fr-FR" smtClean="0"/>
-              <a:t>17/01/2026</a:t>
+              <a:t>23/01/2026</a:t>
             </a:fld>
             <a:endParaRPr lang="fr-FR"/>
           </a:p>
@@ -3861,7 +3861,7 @@
           <a:p>
             <a:fld id="{9A2ADD78-B297-491E-B195-029A9672D6CB}" type="datetimeFigureOut">
               <a:rPr lang="fr-FR" smtClean="0"/>
-              <a:t>17/01/2026</a:t>
+              <a:t>23/01/2026</a:t>
             </a:fld>
             <a:endParaRPr lang="fr-FR"/>
           </a:p>
@@ -4066,7 +4066,7 @@
           <a:p>
             <a:fld id="{9A2ADD78-B297-491E-B195-029A9672D6CB}" type="datetimeFigureOut">
               <a:rPr lang="fr-FR" smtClean="0"/>
-              <a:t>17/01/2026</a:t>
+              <a:t>23/01/2026</a:t>
             </a:fld>
             <a:endParaRPr lang="fr-FR"/>
           </a:p>
@@ -4346,7 +4346,7 @@
           <a:p>
             <a:fld id="{9A2ADD78-B297-491E-B195-029A9672D6CB}" type="datetimeFigureOut">
               <a:rPr lang="fr-FR" smtClean="0"/>
-              <a:t>17/01/2026</a:t>
+              <a:t>23/01/2026</a:t>
             </a:fld>
             <a:endParaRPr lang="fr-FR"/>
           </a:p>
@@ -4613,7 +4613,7 @@
           <a:p>
             <a:fld id="{9A2ADD78-B297-491E-B195-029A9672D6CB}" type="datetimeFigureOut">
               <a:rPr lang="fr-FR" smtClean="0"/>
-              <a:t>17/01/2026</a:t>
+              <a:t>23/01/2026</a:t>
             </a:fld>
             <a:endParaRPr lang="fr-FR"/>
           </a:p>
@@ -5028,7 +5028,7 @@
           <a:p>
             <a:fld id="{9A2ADD78-B297-491E-B195-029A9672D6CB}" type="datetimeFigureOut">
               <a:rPr lang="fr-FR" smtClean="0"/>
-              <a:t>17/01/2026</a:t>
+              <a:t>23/01/2026</a:t>
             </a:fld>
             <a:endParaRPr lang="fr-FR"/>
           </a:p>
@@ -5176,7 +5176,7 @@
           <a:p>
             <a:fld id="{9A2ADD78-B297-491E-B195-029A9672D6CB}" type="datetimeFigureOut">
               <a:rPr lang="fr-FR" smtClean="0"/>
-              <a:t>17/01/2026</a:t>
+              <a:t>23/01/2026</a:t>
             </a:fld>
             <a:endParaRPr lang="fr-FR"/>
           </a:p>
@@ -5301,7 +5301,7 @@
           <a:p>
             <a:fld id="{9A2ADD78-B297-491E-B195-029A9672D6CB}" type="datetimeFigureOut">
               <a:rPr lang="fr-FR" smtClean="0"/>
-              <a:t>17/01/2026</a:t>
+              <a:t>23/01/2026</a:t>
             </a:fld>
             <a:endParaRPr lang="fr-FR"/>
           </a:p>
@@ -5580,7 +5580,7 @@
           <a:p>
             <a:fld id="{9A2ADD78-B297-491E-B195-029A9672D6CB}" type="datetimeFigureOut">
               <a:rPr lang="fr-FR" smtClean="0"/>
-              <a:t>17/01/2026</a:t>
+              <a:t>23/01/2026</a:t>
             </a:fld>
             <a:endParaRPr lang="fr-FR"/>
           </a:p>
@@ -5892,7 +5892,7 @@
           <a:p>
             <a:fld id="{9A2ADD78-B297-491E-B195-029A9672D6CB}" type="datetimeFigureOut">
               <a:rPr lang="fr-FR" smtClean="0"/>
-              <a:t>17/01/2026</a:t>
+              <a:t>23/01/2026</a:t>
             </a:fld>
             <a:endParaRPr lang="fr-FR"/>
           </a:p>
@@ -6145,7 +6145,7 @@
           <a:p>
             <a:fld id="{9A2ADD78-B297-491E-B195-029A9672D6CB}" type="datetimeFigureOut">
               <a:rPr lang="fr-FR" smtClean="0"/>
-              <a:t>17/01/2026</a:t>
+              <a:t>23/01/2026</a:t>
             </a:fld>
             <a:endParaRPr lang="fr-FR"/>
           </a:p>
@@ -12964,10 +12964,16 @@
           <a:lstStyle/>
           <a:p>
             <a:r>
-              <a:rPr lang="en-US" sz="4400" dirty="0" smtClean="0"/>
+              <a:rPr lang="en-US" sz="4400" dirty="0" smtClean="0">
+                <a:latin typeface="Times New Roman" panose="02020603050405020304" pitchFamily="18" charset="0"/>
+                <a:cs typeface="Times New Roman" panose="02020603050405020304" pitchFamily="18" charset="0"/>
+              </a:rPr>
               <a:t>INTRODUCTION</a:t>
             </a:r>
-            <a:endParaRPr lang="fr-FR" sz="4400" dirty="0"/>
+            <a:endParaRPr lang="fr-FR" sz="4400" dirty="0">
+              <a:latin typeface="Times New Roman" panose="02020603050405020304" pitchFamily="18" charset="0"/>
+              <a:cs typeface="Times New Roman" panose="02020603050405020304" pitchFamily="18" charset="0"/>
+            </a:endParaRPr>
           </a:p>
         </p:txBody>
       </p:sp>
@@ -13489,18 +13495,30 @@
           <a:lstStyle/>
           <a:p>
             <a:r>
-              <a:rPr lang="en-US" sz="4000" dirty="0" smtClean="0"/>
+              <a:rPr lang="en-US" sz="4000" dirty="0" smtClean="0">
+                <a:latin typeface="Times New Roman" panose="02020603050405020304" pitchFamily="18" charset="0"/>
+                <a:cs typeface="Times New Roman" panose="02020603050405020304" pitchFamily="18" charset="0"/>
+              </a:rPr>
               <a:t>I. </a:t>
             </a:r>
             <a:r>
-              <a:rPr lang="en-US" sz="4000" dirty="0" err="1" smtClean="0"/>
+              <a:rPr lang="en-US" sz="4000" dirty="0" err="1" smtClean="0">
+                <a:latin typeface="Times New Roman" panose="02020603050405020304" pitchFamily="18" charset="0"/>
+                <a:cs typeface="Times New Roman" panose="02020603050405020304" pitchFamily="18" charset="0"/>
+              </a:rPr>
               <a:t>Contexte</a:t>
             </a:r>
             <a:r>
-              <a:rPr lang="en-US" sz="4000" dirty="0" smtClean="0"/>
+              <a:rPr lang="en-US" sz="4000" dirty="0" smtClean="0">
+                <a:latin typeface="Times New Roman" panose="02020603050405020304" pitchFamily="18" charset="0"/>
+                <a:cs typeface="Times New Roman" panose="02020603050405020304" pitchFamily="18" charset="0"/>
+              </a:rPr>
               <a:t> ET OBJECTIFS</a:t>
             </a:r>
-            <a:endParaRPr lang="fr-FR" sz="4000" dirty="0"/>
+            <a:endParaRPr lang="fr-FR" sz="4000" dirty="0">
+              <a:latin typeface="Times New Roman" panose="02020603050405020304" pitchFamily="18" charset="0"/>
+              <a:cs typeface="Times New Roman" panose="02020603050405020304" pitchFamily="18" charset="0"/>
+            </a:endParaRPr>
           </a:p>
         </p:txBody>
       </p:sp>
@@ -13513,7 +13531,7 @@
         <p:spPr>
           <a:xfrm>
             <a:off x="969005" y="3173160"/>
-            <a:ext cx="10597279" cy="579582"/>
+            <a:ext cx="10597279" cy="646331"/>
           </a:xfrm>
           <a:prstGeom prst="rect">
             <a:avLst/>
@@ -13538,7 +13556,10 @@
               </a:rPr>
               <a:t>	</a:t>
             </a:r>
-            <a:endParaRPr lang="fr-FR" dirty="0"/>
+            <a:endParaRPr lang="fr-FR" dirty="0">
+              <a:latin typeface="Times New Roman" panose="02020603050405020304" pitchFamily="18" charset="0"/>
+              <a:cs typeface="Times New Roman" panose="02020603050405020304" pitchFamily="18" charset="0"/>
+            </a:endParaRPr>
           </a:p>
         </p:txBody>
       </p:sp>
@@ -13614,52 +13635,86 @@
             </a:pPr>
             <a:r>
               <a:rPr lang="en-US" altLang="en-US" sz="1600" dirty="0" smtClean="0">
-                <a:latin typeface="Arial" panose="020B0604020202020204" pitchFamily="34" charset="0"/>
+                <a:latin typeface="Times New Roman" panose="02020603050405020304" pitchFamily="18" charset="0"/>
+                <a:cs typeface="Times New Roman" panose="02020603050405020304" pitchFamily="18" charset="0"/>
               </a:rPr>
               <a:t>	</a:t>
             </a:r>
             <a:r>
-              <a:rPr lang="fr-FR" sz="2000" dirty="0"/>
+              <a:rPr lang="fr-FR" sz="2000" dirty="0">
+                <a:latin typeface="Times New Roman" panose="02020603050405020304" pitchFamily="18" charset="0"/>
+                <a:cs typeface="Times New Roman" panose="02020603050405020304" pitchFamily="18" charset="0"/>
+              </a:rPr>
               <a:t>Le projet </a:t>
             </a:r>
             <a:r>
-              <a:rPr lang="fr-FR" sz="2000" b="1" dirty="0" err="1"/>
+              <a:rPr lang="fr-FR" sz="2000" b="1" dirty="0" err="1">
+                <a:latin typeface="Times New Roman" panose="02020603050405020304" pitchFamily="18" charset="0"/>
+                <a:cs typeface="Times New Roman" panose="02020603050405020304" pitchFamily="18" charset="0"/>
+              </a:rPr>
               <a:t>Multicore</a:t>
             </a:r>
             <a:r>
-              <a:rPr lang="fr-FR" sz="2000" b="1" dirty="0"/>
+              <a:rPr lang="fr-FR" sz="2000" b="1" dirty="0">
+                <a:latin typeface="Times New Roman" panose="02020603050405020304" pitchFamily="18" charset="0"/>
+                <a:cs typeface="Times New Roman" panose="02020603050405020304" pitchFamily="18" charset="0"/>
+              </a:rPr>
               <a:t> Monitor</a:t>
             </a:r>
             <a:r>
-              <a:rPr lang="fr-FR" sz="2000" dirty="0"/>
+              <a:rPr lang="fr-FR" sz="2000" dirty="0">
+                <a:latin typeface="Times New Roman" panose="02020603050405020304" pitchFamily="18" charset="0"/>
+                <a:cs typeface="Times New Roman" panose="02020603050405020304" pitchFamily="18" charset="0"/>
+              </a:rPr>
               <a:t> émerge dans un contexte technologique où la virtualisation, le calcul intensif (HPC) et la conteneurisation sollicitent les processeurs de manière hétérogène. Sous </a:t>
             </a:r>
             <a:r>
-              <a:rPr lang="fr-FR" sz="2000" b="1" dirty="0"/>
+              <a:rPr lang="fr-FR" sz="2000" b="1" dirty="0">
+                <a:latin typeface="Times New Roman" panose="02020603050405020304" pitchFamily="18" charset="0"/>
+                <a:cs typeface="Times New Roman" panose="02020603050405020304" pitchFamily="18" charset="0"/>
+              </a:rPr>
               <a:t>Linux </a:t>
             </a:r>
             <a:r>
-              <a:rPr lang="fr-FR" sz="2000" b="1" dirty="0" err="1"/>
+              <a:rPr lang="fr-FR" sz="2000" b="1" dirty="0" err="1">
+                <a:latin typeface="Times New Roman" panose="02020603050405020304" pitchFamily="18" charset="0"/>
+                <a:cs typeface="Times New Roman" panose="02020603050405020304" pitchFamily="18" charset="0"/>
+              </a:rPr>
               <a:t>openSUSE</a:t>
             </a:r>
             <a:r>
-              <a:rPr lang="fr-FR" sz="2000" dirty="0"/>
+              <a:rPr lang="fr-FR" sz="2000" dirty="0">
+                <a:latin typeface="Times New Roman" panose="02020603050405020304" pitchFamily="18" charset="0"/>
+                <a:cs typeface="Times New Roman" panose="02020603050405020304" pitchFamily="18" charset="0"/>
+              </a:rPr>
               <a:t>, bien que des outils comme </a:t>
             </a:r>
             <a:r>
-              <a:rPr lang="fr-FR" sz="2000" i="1" dirty="0"/>
+              <a:rPr lang="fr-FR" sz="2000" i="1" dirty="0">
+                <a:latin typeface="Times New Roman" panose="02020603050405020304" pitchFamily="18" charset="0"/>
+                <a:cs typeface="Times New Roman" panose="02020603050405020304" pitchFamily="18" charset="0"/>
+              </a:rPr>
               <a:t>top</a:t>
             </a:r>
             <a:r>
-              <a:rPr lang="fr-FR" sz="2000" dirty="0"/>
+              <a:rPr lang="fr-FR" sz="2000" dirty="0">
+                <a:latin typeface="Times New Roman" panose="02020603050405020304" pitchFamily="18" charset="0"/>
+                <a:cs typeface="Times New Roman" panose="02020603050405020304" pitchFamily="18" charset="0"/>
+              </a:rPr>
               <a:t> ou </a:t>
             </a:r>
             <a:r>
-              <a:rPr lang="fr-FR" sz="2000" i="1" dirty="0" err="1"/>
+              <a:rPr lang="fr-FR" sz="2000" i="1" dirty="0" err="1">
+                <a:latin typeface="Times New Roman" panose="02020603050405020304" pitchFamily="18" charset="0"/>
+                <a:cs typeface="Times New Roman" panose="02020603050405020304" pitchFamily="18" charset="0"/>
+              </a:rPr>
               <a:t>htop</a:t>
             </a:r>
             <a:r>
-              <a:rPr lang="fr-FR" sz="2000" dirty="0"/>
+              <a:rPr lang="fr-FR" sz="2000" dirty="0">
+                <a:latin typeface="Times New Roman" panose="02020603050405020304" pitchFamily="18" charset="0"/>
+                <a:cs typeface="Times New Roman" panose="02020603050405020304" pitchFamily="18" charset="0"/>
+              </a:rPr>
               <a:t> existent, il devient nécessaire de concevoir une solution dédiée capable d'isoler finement le comportement de chaque cœur physique et logique pour optimiser le rendement système.</a:t>
             </a:r>
             <a:endParaRPr kumimoji="0" lang="en-US" altLang="en-US" sz="1800" b="0" i="0" u="none" strike="noStrike" cap="none" normalizeH="0" baseline="0" dirty="0" smtClean="0">
@@ -13670,7 +13725,8 @@
                 <a:schemeClr val="tx1"/>
               </a:solidFill>
               <a:effectLst/>
-              <a:latin typeface="Arial" panose="020B0604020202020204" pitchFamily="34" charset="0"/>
+              <a:latin typeface="Times New Roman" panose="02020603050405020304" pitchFamily="18" charset="0"/>
+              <a:cs typeface="Times New Roman" panose="02020603050405020304" pitchFamily="18" charset="0"/>
             </a:endParaRPr>
           </a:p>
         </p:txBody>
@@ -13698,10 +13754,16 @@
           <a:lstStyle/>
           <a:p>
             <a:r>
-              <a:rPr lang="fr-CM" sz="3600" b="1" dirty="0" smtClean="0"/>
+              <a:rPr lang="fr-CM" sz="3600" b="1" dirty="0" smtClean="0">
+                <a:latin typeface="Times New Roman" panose="02020603050405020304" pitchFamily="18" charset="0"/>
+                <a:cs typeface="Times New Roman" panose="02020603050405020304" pitchFamily="18" charset="0"/>
+              </a:rPr>
               <a:t>1. Contexte</a:t>
             </a:r>
-            <a:endParaRPr lang="fr-CM" sz="3600" b="1" dirty="0"/>
+            <a:endParaRPr lang="fr-CM" sz="3600" b="1" dirty="0">
+              <a:latin typeface="Times New Roman" panose="02020603050405020304" pitchFamily="18" charset="0"/>
+              <a:cs typeface="Times New Roman" panose="02020603050405020304" pitchFamily="18" charset="0"/>
+            </a:endParaRPr>
           </a:p>
         </p:txBody>
       </p:sp>
